--- a/set/2026-10-04 ECBC-CH.pptx
+++ b/set/2026-10-04 ECBC-CH.pptx
@@ -307,7 +307,7 @@
           <a:p>
             <a:fld id="{5448A3D2-9408-4143-A73F-7F223505335E}" type="datetimeFigureOut">
               <a:rPr lang="en-US" smtClean="0"/>
-              <a:t>10/1/26</a:t>
+              <a:t>10/4/26</a:t>
             </a:fld>
             <a:endParaRPr lang="en-US"/>
           </a:p>
@@ -505,7 +505,7 @@
           <a:p>
             <a:fld id="{5448A3D2-9408-4143-A73F-7F223505335E}" type="datetimeFigureOut">
               <a:rPr lang="en-US" smtClean="0"/>
-              <a:t>10/1/26</a:t>
+              <a:t>10/4/26</a:t>
             </a:fld>
             <a:endParaRPr lang="en-US"/>
           </a:p>
@@ -713,7 +713,7 @@
           <a:p>
             <a:fld id="{5448A3D2-9408-4143-A73F-7F223505335E}" type="datetimeFigureOut">
               <a:rPr lang="en-US" smtClean="0"/>
-              <a:t>10/1/26</a:t>
+              <a:t>10/4/26</a:t>
             </a:fld>
             <a:endParaRPr lang="en-US"/>
           </a:p>
@@ -911,7 +911,7 @@
           <a:p>
             <a:fld id="{5448A3D2-9408-4143-A73F-7F223505335E}" type="datetimeFigureOut">
               <a:rPr lang="en-US" smtClean="0"/>
-              <a:t>10/1/26</a:t>
+              <a:t>10/4/26</a:t>
             </a:fld>
             <a:endParaRPr lang="en-US"/>
           </a:p>
@@ -1186,7 +1186,7 @@
           <a:p>
             <a:fld id="{5448A3D2-9408-4143-A73F-7F223505335E}" type="datetimeFigureOut">
               <a:rPr lang="en-US" smtClean="0"/>
-              <a:t>10/1/26</a:t>
+              <a:t>10/4/26</a:t>
             </a:fld>
             <a:endParaRPr lang="en-US"/>
           </a:p>
@@ -1451,7 +1451,7 @@
           <a:p>
             <a:fld id="{5448A3D2-9408-4143-A73F-7F223505335E}" type="datetimeFigureOut">
               <a:rPr lang="en-US" smtClean="0"/>
-              <a:t>10/1/26</a:t>
+              <a:t>10/4/26</a:t>
             </a:fld>
             <a:endParaRPr lang="en-US"/>
           </a:p>
@@ -1863,7 +1863,7 @@
           <a:p>
             <a:fld id="{5448A3D2-9408-4143-A73F-7F223505335E}" type="datetimeFigureOut">
               <a:rPr lang="en-US" smtClean="0"/>
-              <a:t>10/1/26</a:t>
+              <a:t>10/4/26</a:t>
             </a:fld>
             <a:endParaRPr lang="en-US"/>
           </a:p>
@@ -2004,7 +2004,7 @@
           <a:p>
             <a:fld id="{5448A3D2-9408-4143-A73F-7F223505335E}" type="datetimeFigureOut">
               <a:rPr lang="en-US" smtClean="0"/>
-              <a:t>10/1/26</a:t>
+              <a:t>10/4/26</a:t>
             </a:fld>
             <a:endParaRPr lang="en-US"/>
           </a:p>
@@ -2117,7 +2117,7 @@
           <a:p>
             <a:fld id="{5448A3D2-9408-4143-A73F-7F223505335E}" type="datetimeFigureOut">
               <a:rPr lang="en-US" smtClean="0"/>
-              <a:t>10/1/26</a:t>
+              <a:t>10/4/26</a:t>
             </a:fld>
             <a:endParaRPr lang="en-US"/>
           </a:p>
@@ -2428,7 +2428,7 @@
           <a:p>
             <a:fld id="{5448A3D2-9408-4143-A73F-7F223505335E}" type="datetimeFigureOut">
               <a:rPr lang="en-US" smtClean="0"/>
-              <a:t>10/1/26</a:t>
+              <a:t>10/4/26</a:t>
             </a:fld>
             <a:endParaRPr lang="en-US"/>
           </a:p>
@@ -2716,7 +2716,7 @@
           <a:p>
             <a:fld id="{5448A3D2-9408-4143-A73F-7F223505335E}" type="datetimeFigureOut">
               <a:rPr lang="en-US" smtClean="0"/>
-              <a:t>10/1/26</a:t>
+              <a:t>10/4/26</a:t>
             </a:fld>
             <a:endParaRPr lang="en-US"/>
           </a:p>
@@ -2957,7 +2957,7 @@
           <a:p>
             <a:fld id="{5448A3D2-9408-4143-A73F-7F223505335E}" type="datetimeFigureOut">
               <a:rPr lang="en-US" smtClean="0"/>
-              <a:t>10/1/26</a:t>
+              <a:t>10/4/26</a:t>
             </a:fld>
             <a:endParaRPr lang="en-US"/>
           </a:p>
@@ -7013,8 +7013,8 @@
         </p:nvSpPr>
         <p:spPr>
           <a:xfrm>
-            <a:off x="222738" y="211015"/>
-            <a:ext cx="11699631" cy="6482862"/>
+            <a:off x="222739" y="211015"/>
+            <a:ext cx="9194394" cy="6482862"/>
           </a:xfrm>
         </p:spPr>
         <p:txBody>
@@ -7112,6 +7112,45 @@
                 <a:ea typeface="Bodoni Ornaments" pitchFamily="2" charset="0"/>
               </a:rPr>
               <a:t> </a:t>
+            </a:r>
+          </a:p>
+        </p:txBody>
+      </p:sp>
+      <p:sp>
+        <p:nvSpPr>
+          <p:cNvPr id="2" name="TextBox 1">
+            <a:extLst>
+              <a:ext uri="{FF2B5EF4-FFF2-40B4-BE49-F238E27FC236}">
+                <a16:creationId xmlns:a16="http://schemas.microsoft.com/office/drawing/2014/main" id="{EDEF077B-E187-4A75-6213-80B33FBDEDD5}"/>
+              </a:ext>
+            </a:extLst>
+          </p:cNvPr>
+          <p:cNvSpPr txBox="1"/>
+          <p:nvPr/>
+        </p:nvSpPr>
+        <p:spPr>
+          <a:xfrm>
+            <a:off x="9647920" y="6170657"/>
+            <a:ext cx="2321341" cy="523220"/>
+          </a:xfrm>
+          <a:prstGeom prst="rect">
+            <a:avLst/>
+          </a:prstGeom>
+          <a:noFill/>
+        </p:spPr>
+        <p:txBody>
+          <a:bodyPr wrap="none" rtlCol="0">
+            <a:spAutoFit/>
+          </a:bodyPr>
+          <a:lstStyle/>
+          <a:p>
+            <a:r>
+              <a:rPr lang="en-US" sz="2800" b="1" dirty="0">
+                <a:solidFill>
+                  <a:schemeClr val="bg1"/>
+                </a:solidFill>
+              </a:rPr>
+              <a:t>Go to Chorus</a:t>
             </a:r>
           </a:p>
         </p:txBody>
